--- a/presentation/hypothesis_only_nli_presentation.pptx
+++ b/presentation/hypothesis_only_nli_presentation.pptx
@@ -2298,7 +2298,7 @@
                   <a:srgbClr val="8A837B"/>
                 </a:solidFill>
               </a:rPr>
-              <a:t>Source: ACL Anthology paper</a:t>
+              <a:t>*SEM 2018</a:t>
             </a:r>
             <a:endParaRPr lang="en-US" sz="820" dirty="0"/>
           </a:p>
@@ -2410,7 +2410,7 @@
                   <a:srgbClr val="6B6B6B"/>
                 </a:solidFill>
               </a:rPr>
-              <a:t>These are useful points to mention if the professor asks questions.</a:t>
+              <a:t>Three limitations worth keeping in mind — none of them fatal.</a:t>
             </a:r>
             <a:endParaRPr lang="en-US" sz="1400" dirty="0"/>
           </a:p>
@@ -2818,7 +2818,7 @@
                   <a:srgbClr val="8A837B"/>
                 </a:solidFill>
               </a:rPr>
-              <a:t>Source: ACL Anthology paper</a:t>
+              <a:t>*SEM 2018</a:t>
             </a:r>
             <a:endParaRPr lang="en-US" sz="820" dirty="0"/>
           </a:p>
@@ -3492,7 +3492,7 @@
                   <a:srgbClr val="8A837B"/>
                 </a:solidFill>
               </a:rPr>
-              <a:t>Source: ACL Anthology paper</a:t>
+              <a:t>*SEM 2018</a:t>
             </a:r>
             <a:endParaRPr lang="en-US" sz="820" dirty="0"/>
           </a:p>
@@ -3757,7 +3757,7 @@
                   <a:srgbClr val="8A837B"/>
                 </a:solidFill>
               </a:rPr>
-              <a:t>Source: ACL Anthology paper</a:t>
+              <a:t>*SEM 2018</a:t>
             </a:r>
             <a:endParaRPr lang="en-US" sz="820" dirty="0"/>
           </a:p>
@@ -4521,7 +4521,7 @@
                   <a:srgbClr val="8A837B"/>
                 </a:solidFill>
               </a:rPr>
-              <a:t>Source: ACL Anthology paper</a:t>
+              <a:t>*SEM 2018</a:t>
             </a:r>
             <a:endParaRPr lang="en-US" sz="820" dirty="0"/>
           </a:p>
@@ -5159,7 +5159,7 @@
                   <a:srgbClr val="8A837B"/>
                 </a:solidFill>
               </a:rPr>
-              <a:t>Source: ACL Anthology paper</a:t>
+              <a:t>*SEM 2018</a:t>
             </a:r>
             <a:endParaRPr lang="en-US" sz="820" dirty="0"/>
           </a:p>
@@ -5907,7 +5907,7 @@
                   <a:srgbClr val="8A837B"/>
                 </a:solidFill>
               </a:rPr>
-              <a:t>Source: ACL Anthology paper</a:t>
+              <a:t>*SEM 2018</a:t>
             </a:r>
             <a:endParaRPr lang="en-US" sz="820" dirty="0"/>
           </a:p>
@@ -6465,7 +6465,7 @@
                   <a:srgbClr val="8A837B"/>
                 </a:solidFill>
               </a:rPr>
-              <a:t>Source: ACL Anthology paper</a:t>
+              <a:t>*SEM 2018</a:t>
             </a:r>
             <a:endParaRPr lang="en-US" sz="820" dirty="0"/>
           </a:p>
@@ -7837,7 +7837,7 @@
                   <a:srgbClr val="8A837B"/>
                 </a:solidFill>
               </a:rPr>
-              <a:t>Source: ACL Anthology paper</a:t>
+              <a:t>*SEM 2018</a:t>
             </a:r>
             <a:endParaRPr lang="en-US" sz="820" dirty="0"/>
           </a:p>
@@ -8499,7 +8499,7 @@
                   <a:srgbClr val="8A837B"/>
                 </a:solidFill>
               </a:rPr>
-              <a:t>Source: ACL Anthology paper</a:t>
+              <a:t>*SEM 2018</a:t>
             </a:r>
             <a:endParaRPr lang="en-US" sz="820" dirty="0"/>
           </a:p>
@@ -9079,7 +9079,7 @@
                   <a:srgbClr val="8A837B"/>
                 </a:solidFill>
               </a:rPr>
-              <a:t>Source: ACL Anthology paper</a:t>
+              <a:t>*SEM 2018</a:t>
             </a:r>
             <a:endParaRPr lang="en-US" sz="820" dirty="0"/>
           </a:p>
@@ -9645,7 +9645,7 @@
                   <a:srgbClr val="8A837B"/>
                 </a:solidFill>
               </a:rPr>
-              <a:t>Source: ACL Anthology paper</a:t>
+              <a:t>*SEM 2018</a:t>
             </a:r>
             <a:endParaRPr lang="en-US" sz="820" dirty="0"/>
           </a:p>
